--- a/docs/formacion/presentacion_flujo_informacion.pptx
+++ b/docs/formacion/presentacion_flujo_informacion.pptx
@@ -6420,14 +6420,221 @@
       </p:sp>
       <p:sp>
         <p:nvSpPr>
-          <p:cNvPr id="8" name="Shape 5"/>
-          <p:cNvSpPr/>
-          <p:nvPr/>
-        </p:nvSpPr>
-        <p:spPr>
-          <a:xfrm>
-            <a:off x="548640" y="2834640"/>
-            <a:ext cx="1572768" cy="384048"/>
+          <p:cNvPr id="8" name="Text 5"/>
+          <p:cNvSpPr/>
+          <p:nvPr/>
+        </p:nvSpPr>
+        <p:spPr>
+          <a:xfrm>
+            <a:off x="548640" y="1298448"/>
+            <a:ext cx="6400800" cy="237744"/>
+          </a:xfrm>
+          <a:prstGeom prst="rect">
+            <a:avLst/>
+          </a:prstGeom>
+          <a:noFill/>
+          <a:ln/>
+        </p:spPr>
+        <p:txBody>
+          <a:bodyPr wrap="square" lIns="0" tIns="0" rIns="0" bIns="0" rtlCol="0" anchor="ctr"/>
+          <a:lstStyle/>
+          <a:p>
+            <a:pPr indent="0" marL="0">
+              <a:buNone/>
+            </a:pPr>
+            <a:r>
+              <a:rPr lang="en-US" sz="1100" b="1" dirty="0">
+                <a:solidFill>
+                  <a:srgbClr val="1565C0"/>
+                </a:solidFill>
+                <a:latin typeface="Calibri" pitchFamily="34" charset="0"/>
+                <a:ea typeface="Calibri" pitchFamily="34" charset="-122"/>
+                <a:cs typeface="Calibri" pitchFamily="34" charset="-120"/>
+              </a:rPr>
+              <a:t>Azul = Enagas (web)</a:t>
+            </a:r>
+            <a:pPr indent="0" marL="0">
+              <a:buNone/>
+            </a:pPr>
+            <a:r>
+              <a:rPr lang="en-US" sz="1100" dirty="0">
+                <a:solidFill>
+                  <a:srgbClr val="6B6B6B"/>
+                </a:solidFill>
+                <a:latin typeface="Calibri" pitchFamily="34" charset="0"/>
+                <a:ea typeface="Calibri" pitchFamily="34" charset="-122"/>
+                <a:cs typeface="Calibri" pitchFamily="34" charset="-120"/>
+              </a:rPr>
+              <a:t>   ·   </a:t>
+            </a:r>
+            <a:pPr indent="0" marL="0">
+              <a:buNone/>
+            </a:pPr>
+            <a:r>
+              <a:rPr lang="en-US" sz="1100" b="1" dirty="0">
+                <a:solidFill>
+                  <a:srgbClr val="2C5F2D"/>
+                </a:solidFill>
+                <a:latin typeface="Calibri" pitchFamily="34" charset="0"/>
+                <a:ea typeface="Calibri" pitchFamily="34" charset="-122"/>
+                <a:cs typeface="Calibri" pitchFamily="34" charset="-120"/>
+              </a:rPr>
+              <a:t>Verde = Operario (móvil)</a:t>
+            </a:r>
+            <a:endParaRPr lang="en-US" sz="1100" dirty="0"/>
+          </a:p>
+        </p:txBody>
+      </p:sp>
+      <p:sp>
+        <p:nvSpPr>
+          <p:cNvPr id="9" name="Shape 6"/>
+          <p:cNvSpPr/>
+          <p:nvPr/>
+        </p:nvSpPr>
+        <p:spPr>
+          <a:xfrm>
+            <a:off x="5943600" y="1810512"/>
+            <a:ext cx="0" cy="2907792"/>
+          </a:xfrm>
+          <a:prstGeom prst="line">
+            <a:avLst/>
+          </a:prstGeom>
+          <a:noFill/>
+          <a:ln w="15875">
+            <a:solidFill>
+              <a:srgbClr val="97BC62"/>
+            </a:solidFill>
+            <a:prstDash val="dash"/>
+          </a:ln>
+        </p:spPr>
+      </p:sp>
+      <p:sp>
+        <p:nvSpPr>
+          <p:cNvPr id="10" name="Text 7"/>
+          <p:cNvSpPr/>
+          <p:nvPr/>
+        </p:nvSpPr>
+        <p:spPr>
+          <a:xfrm>
+            <a:off x="548640" y="1554480"/>
+            <a:ext cx="5394960" cy="237744"/>
+          </a:xfrm>
+          <a:prstGeom prst="rect">
+            <a:avLst/>
+          </a:prstGeom>
+          <a:noFill/>
+          <a:ln/>
+        </p:spPr>
+        <p:txBody>
+          <a:bodyPr wrap="square" lIns="0" tIns="0" rIns="0" bIns="0" rtlCol="0" anchor="ctr"/>
+          <a:lstStyle/>
+          <a:p>
+            <a:pPr algn="ctr" indent="0" marL="0">
+              <a:buNone/>
+            </a:pPr>
+            <a:r>
+              <a:rPr lang="en-US" sz="1050" i="1" dirty="0">
+                <a:solidFill>
+                  <a:srgbClr val="6B6B6B"/>
+                </a:solidFill>
+                <a:latin typeface="Calibri" pitchFamily="34" charset="0"/>
+                <a:ea typeface="Calibri" pitchFamily="34" charset="-122"/>
+                <a:cs typeface="Calibri" pitchFamily="34" charset="-120"/>
+              </a:rPr>
+              <a:t>El arranque cambia según el caso</a:t>
+            </a:r>
+            <a:endParaRPr lang="en-US" sz="1050" dirty="0"/>
+          </a:p>
+        </p:txBody>
+      </p:sp>
+      <p:sp>
+        <p:nvSpPr>
+          <p:cNvPr id="11" name="Text 8"/>
+          <p:cNvSpPr/>
+          <p:nvPr/>
+        </p:nvSpPr>
+        <p:spPr>
+          <a:xfrm>
+            <a:off x="5943600" y="1554480"/>
+            <a:ext cx="5696712" cy="237744"/>
+          </a:xfrm>
+          <a:prstGeom prst="rect">
+            <a:avLst/>
+          </a:prstGeom>
+          <a:noFill/>
+          <a:ln/>
+        </p:spPr>
+        <p:txBody>
+          <a:bodyPr wrap="square" lIns="0" tIns="0" rIns="0" bIns="0" rtlCol="0" anchor="ctr"/>
+          <a:lstStyle/>
+          <a:p>
+            <a:pPr algn="ctr" indent="0" marL="0">
+              <a:buNone/>
+            </a:pPr>
+            <a:r>
+              <a:rPr lang="en-US" sz="1050" b="1" i="1" dirty="0">
+                <a:solidFill>
+                  <a:srgbClr val="2C5F2D"/>
+                </a:solidFill>
+                <a:latin typeface="Calibri" pitchFamily="34" charset="0"/>
+                <a:ea typeface="Calibri" pitchFamily="34" charset="-122"/>
+                <a:cs typeface="Calibri" pitchFamily="34" charset="-120"/>
+              </a:rPr>
+              <a:t>Tramo común: ejecutar → finalizar → cerrar</a:t>
+            </a:r>
+            <a:endParaRPr lang="en-US" sz="1050" dirty="0"/>
+          </a:p>
+        </p:txBody>
+      </p:sp>
+      <p:sp>
+        <p:nvSpPr>
+          <p:cNvPr id="12" name="Text 9"/>
+          <p:cNvSpPr/>
+          <p:nvPr/>
+        </p:nvSpPr>
+        <p:spPr>
+          <a:xfrm>
+            <a:off x="548640" y="1965960"/>
+            <a:ext cx="1463040" cy="237744"/>
+          </a:xfrm>
+          <a:prstGeom prst="rect">
+            <a:avLst/>
+          </a:prstGeom>
+          <a:noFill/>
+          <a:ln/>
+        </p:spPr>
+        <p:txBody>
+          <a:bodyPr wrap="square" lIns="0" tIns="0" rIns="0" bIns="0" rtlCol="0" anchor="ctr"/>
+          <a:lstStyle/>
+          <a:p>
+            <a:pPr algn="ctr" indent="0" marL="0">
+              <a:buNone/>
+            </a:pPr>
+            <a:r>
+              <a:rPr lang="en-US" sz="950" b="1" dirty="0">
+                <a:solidFill>
+                  <a:srgbClr val="1565C0"/>
+                </a:solidFill>
+                <a:latin typeface="Calibri" pitchFamily="34" charset="0"/>
+                <a:ea typeface="Calibri" pitchFamily="34" charset="-122"/>
+                <a:cs typeface="Calibri" pitchFamily="34" charset="-120"/>
+              </a:rPr>
+              <a:t>Enagas</a:t>
+            </a:r>
+            <a:endParaRPr lang="en-US" sz="950" dirty="0"/>
+          </a:p>
+        </p:txBody>
+      </p:sp>
+      <p:sp>
+        <p:nvSpPr>
+          <p:cNvPr id="13" name="Shape 10"/>
+          <p:cNvSpPr/>
+          <p:nvPr/>
+        </p:nvSpPr>
+        <p:spPr>
+          <a:xfrm>
+            <a:off x="548640" y="2240280"/>
+            <a:ext cx="1463040" cy="384048"/>
           </a:xfrm>
           <a:prstGeom prst="roundRect">
             <a:avLst>
@@ -6449,14 +6656,14 @@
       </p:sp>
       <p:sp>
         <p:nvSpPr>
-          <p:cNvPr id="9" name="Text 6"/>
-          <p:cNvSpPr/>
-          <p:nvPr/>
-        </p:nvSpPr>
-        <p:spPr>
-          <a:xfrm>
-            <a:off x="548640" y="2834640"/>
-            <a:ext cx="1572768" cy="384048"/>
+          <p:cNvPr id="14" name="Text 11"/>
+          <p:cNvSpPr/>
+          <p:nvPr/>
+        </p:nvSpPr>
+        <p:spPr>
+          <a:xfrm>
+            <a:off x="548640" y="2240280"/>
+            <a:ext cx="1463040" cy="384048"/>
           </a:xfrm>
           <a:prstGeom prst="rect">
             <a:avLst/>
@@ -6488,14 +6695,38 @@
       </p:sp>
       <p:sp>
         <p:nvSpPr>
-          <p:cNvPr id="10" name="Text 7"/>
-          <p:cNvSpPr/>
-          <p:nvPr/>
-        </p:nvSpPr>
-        <p:spPr>
-          <a:xfrm>
-            <a:off x="548640" y="2523744"/>
-            <a:ext cx="1572768" cy="274320"/>
+          <p:cNvPr id="15" name="Shape 12"/>
+          <p:cNvSpPr/>
+          <p:nvPr/>
+        </p:nvSpPr>
+        <p:spPr>
+          <a:xfrm>
+            <a:off x="2057400" y="2450592"/>
+            <a:ext cx="4041648" cy="0"/>
+          </a:xfrm>
+          <a:prstGeom prst="line">
+            <a:avLst/>
+          </a:prstGeom>
+          <a:noFill/>
+          <a:ln w="25400">
+            <a:solidFill>
+              <a:srgbClr val="97BC62"/>
+            </a:solidFill>
+            <a:prstDash val="solid"/>
+            <a:tailEnd type="triangle"/>
+          </a:ln>
+        </p:spPr>
+      </p:sp>
+      <p:sp>
+        <p:nvSpPr>
+          <p:cNvPr id="16" name="Text 13"/>
+          <p:cNvSpPr/>
+          <p:nvPr/>
+        </p:nvSpPr>
+        <p:spPr>
+          <a:xfrm>
+            <a:off x="2011680" y="1965960"/>
+            <a:ext cx="3886200" cy="237744"/>
           </a:xfrm>
           <a:prstGeom prst="rect">
             <a:avLst/>
@@ -6511,15 +6742,15 @@
               <a:buNone/>
             </a:pPr>
             <a:r>
-              <a:rPr lang="en-US" sz="1000" b="1" dirty="0">
-                <a:solidFill>
-                  <a:srgbClr val="1565C0"/>
-                </a:solidFill>
-                <a:latin typeface="Calibri" pitchFamily="34" charset="0"/>
-                <a:ea typeface="Calibri" pitchFamily="34" charset="-122"/>
-                <a:cs typeface="Calibri" pitchFamily="34" charset="-120"/>
-              </a:rPr>
-              <a:t>Enagas</a:t>
+              <a:rPr lang="en-US" sz="1000" i="1" dirty="0">
+                <a:solidFill>
+                  <a:srgbClr val="6B6B6B"/>
+                </a:solidFill>
+                <a:latin typeface="Calibri" pitchFamily="34" charset="0"/>
+                <a:ea typeface="Calibri" pitchFamily="34" charset="-122"/>
+                <a:cs typeface="Calibri" pitchFamily="34" charset="-120"/>
+              </a:rPr>
+              <a:t>Casos 1-2 · Enagas asigna la zona ya validada</a:t>
             </a:r>
             <a:endParaRPr lang="en-US" sz="1000" dirty="0"/>
           </a:p>
@@ -6527,14 +6758,14 @@
       </p:sp>
       <p:sp>
         <p:nvSpPr>
-          <p:cNvPr id="11" name="Text 8"/>
-          <p:cNvSpPr/>
-          <p:nvPr/>
-        </p:nvSpPr>
-        <p:spPr>
-          <a:xfrm>
-            <a:off x="2121408" y="2834640"/>
-            <a:ext cx="310896" cy="384048"/>
+          <p:cNvPr id="17" name="Text 14"/>
+          <p:cNvSpPr/>
+          <p:nvPr/>
+        </p:nvSpPr>
+        <p:spPr>
+          <a:xfrm>
+            <a:off x="6144768" y="1965960"/>
+            <a:ext cx="1463040" cy="237744"/>
           </a:xfrm>
           <a:prstGeom prst="rect">
             <a:avLst/>
@@ -6550,86 +6781,30 @@
               <a:buNone/>
             </a:pPr>
             <a:r>
-              <a:rPr lang="en-US" sz="1800" b="1" dirty="0">
-                <a:solidFill>
-                  <a:srgbClr val="97BC62"/>
-                </a:solidFill>
-                <a:latin typeface="Calibri" pitchFamily="34" charset="0"/>
-                <a:ea typeface="Calibri" pitchFamily="34" charset="-122"/>
-                <a:cs typeface="Calibri" pitchFamily="34" charset="-120"/>
-              </a:rPr>
-              <a:t>➜</a:t>
-            </a:r>
-            <a:endParaRPr lang="en-US" sz="1800" dirty="0"/>
-          </a:p>
-        </p:txBody>
-      </p:sp>
-      <p:sp>
-        <p:nvSpPr>
-          <p:cNvPr id="12" name="Text 9"/>
-          <p:cNvSpPr/>
-          <p:nvPr/>
-        </p:nvSpPr>
-        <p:spPr>
-          <a:xfrm>
-            <a:off x="1892808" y="3291840"/>
-            <a:ext cx="768096" cy="548640"/>
-          </a:xfrm>
-          <a:prstGeom prst="rect">
-            <a:avLst/>
-          </a:prstGeom>
-          <a:noFill/>
-          <a:ln/>
-        </p:spPr>
-        <p:txBody>
-          <a:bodyPr wrap="square" lIns="0" tIns="0" rIns="0" bIns="0" rtlCol="0" anchor="ctr"/>
-          <a:lstStyle/>
-          <a:p>
-            <a:pPr algn="ctr" indent="0" marL="0">
-              <a:buNone/>
-            </a:pPr>
-            <a:r>
-              <a:rPr lang="en-US" sz="950" i="1" dirty="0">
-                <a:solidFill>
-                  <a:srgbClr val="6B6B6B"/>
-                </a:solidFill>
-                <a:latin typeface="Calibri" pitchFamily="34" charset="0"/>
-                <a:ea typeface="Calibri" pitchFamily="34" charset="-122"/>
-                <a:cs typeface="Calibri" pitchFamily="34" charset="-120"/>
-              </a:rPr>
-              <a:t>el operario</a:t>
+              <a:rPr lang="en-US" sz="950" b="1" dirty="0">
+                <a:solidFill>
+                  <a:srgbClr val="2C5F2D"/>
+                </a:solidFill>
+                <a:latin typeface="Calibri" pitchFamily="34" charset="0"/>
+                <a:ea typeface="Calibri" pitchFamily="34" charset="-122"/>
+                <a:cs typeface="Calibri" pitchFamily="34" charset="-120"/>
+              </a:rPr>
+              <a:t>Operario</a:t>
             </a:r>
             <a:endParaRPr lang="en-US" sz="950" dirty="0"/>
           </a:p>
-          <a:p>
-            <a:pPr algn="ctr" indent="0" marL="0">
-              <a:buNone/>
-            </a:pPr>
-            <a:r>
-              <a:rPr lang="en-US" sz="950" i="1" dirty="0">
-                <a:solidFill>
-                  <a:srgbClr val="6B6B6B"/>
-                </a:solidFill>
-                <a:latin typeface="Calibri" pitchFamily="34" charset="0"/>
-                <a:ea typeface="Calibri" pitchFamily="34" charset="-122"/>
-                <a:cs typeface="Calibri" pitchFamily="34" charset="-120"/>
-              </a:rPr>
-              <a:t>revisa en campo</a:t>
-            </a:r>
-            <a:endParaRPr lang="en-US" sz="950" dirty="0"/>
-          </a:p>
-        </p:txBody>
-      </p:sp>
-      <p:sp>
-        <p:nvSpPr>
-          <p:cNvPr id="13" name="Shape 10"/>
-          <p:cNvSpPr/>
-          <p:nvPr/>
-        </p:nvSpPr>
-        <p:spPr>
-          <a:xfrm>
-            <a:off x="2432304" y="2834640"/>
-            <a:ext cx="1572768" cy="384048"/>
+        </p:txBody>
+      </p:sp>
+      <p:sp>
+        <p:nvSpPr>
+          <p:cNvPr id="18" name="Shape 15"/>
+          <p:cNvSpPr/>
+          <p:nvPr/>
+        </p:nvSpPr>
+        <p:spPr>
+          <a:xfrm>
+            <a:off x="6144768" y="2240280"/>
+            <a:ext cx="1463040" cy="384048"/>
           </a:xfrm>
           <a:prstGeom prst="roundRect">
             <a:avLst>
@@ -6637,7 +6812,7 @@
             </a:avLst>
           </a:prstGeom>
           <a:solidFill>
-            <a:srgbClr val="F45DEA"/>
+            <a:srgbClr val="F57C00"/>
           </a:solidFill>
           <a:ln/>
           <a:effectLst>
@@ -6651,14 +6826,14 @@
       </p:sp>
       <p:sp>
         <p:nvSpPr>
-          <p:cNvPr id="14" name="Text 11"/>
-          <p:cNvSpPr/>
-          <p:nvPr/>
-        </p:nvSpPr>
-        <p:spPr>
-          <a:xfrm>
-            <a:off x="2432304" y="2834640"/>
-            <a:ext cx="1572768" cy="384048"/>
+          <p:cNvPr id="19" name="Text 16"/>
+          <p:cNvSpPr/>
+          <p:nvPr/>
+        </p:nvSpPr>
+        <p:spPr>
+          <a:xfrm>
+            <a:off x="6144768" y="2240280"/>
+            <a:ext cx="1463040" cy="384048"/>
           </a:xfrm>
           <a:prstGeom prst="rect">
             <a:avLst/>
@@ -6682,7 +6857,7 @@
                 <a:ea typeface="Calibri" pitchFamily="34" charset="-122"/>
                 <a:cs typeface="Calibri" pitchFamily="34" charset="-120"/>
               </a:rPr>
-              <a:t>Contratista</a:t>
+              <a:t>En Ejecución</a:t>
             </a:r>
             <a:endParaRPr lang="en-US" sz="1100" dirty="0"/>
           </a:p>
@@ -6690,14 +6865,14 @@
       </p:sp>
       <p:sp>
         <p:nvSpPr>
-          <p:cNvPr id="15" name="Text 12"/>
-          <p:cNvSpPr/>
-          <p:nvPr/>
-        </p:nvSpPr>
-        <p:spPr>
-          <a:xfrm>
-            <a:off x="2432304" y="2523744"/>
-            <a:ext cx="1572768" cy="274320"/>
+          <p:cNvPr id="20" name="Text 17"/>
+          <p:cNvSpPr/>
+          <p:nvPr/>
+        </p:nvSpPr>
+        <p:spPr>
+          <a:xfrm>
+            <a:off x="7607808" y="2240280"/>
+            <a:ext cx="402336" cy="420624"/>
           </a:xfrm>
           <a:prstGeom prst="rect">
             <a:avLst/>
@@ -6713,7 +6888,46 @@
               <a:buNone/>
             </a:pPr>
             <a:r>
-              <a:rPr lang="en-US" sz="1000" b="1" dirty="0">
+              <a:rPr lang="en-US" sz="1600" b="1" dirty="0">
+                <a:solidFill>
+                  <a:srgbClr val="97BC62"/>
+                </a:solidFill>
+                <a:latin typeface="Calibri" pitchFamily="34" charset="0"/>
+                <a:ea typeface="Calibri" pitchFamily="34" charset="-122"/>
+                <a:cs typeface="Calibri" pitchFamily="34" charset="-120"/>
+              </a:rPr>
+              <a:t>➜</a:t>
+            </a:r>
+            <a:endParaRPr lang="en-US" sz="1600" dirty="0"/>
+          </a:p>
+        </p:txBody>
+      </p:sp>
+      <p:sp>
+        <p:nvSpPr>
+          <p:cNvPr id="21" name="Text 18"/>
+          <p:cNvSpPr/>
+          <p:nvPr/>
+        </p:nvSpPr>
+        <p:spPr>
+          <a:xfrm>
+            <a:off x="8010144" y="1965960"/>
+            <a:ext cx="1463040" cy="237744"/>
+          </a:xfrm>
+          <a:prstGeom prst="rect">
+            <a:avLst/>
+          </a:prstGeom>
+          <a:noFill/>
+          <a:ln/>
+        </p:spPr>
+        <p:txBody>
+          <a:bodyPr wrap="square" lIns="0" tIns="0" rIns="0" bIns="0" rtlCol="0" anchor="ctr"/>
+          <a:lstStyle/>
+          <a:p>
+            <a:pPr algn="ctr" indent="0" marL="0">
+              <a:buNone/>
+            </a:pPr>
+            <a:r>
+              <a:rPr lang="en-US" sz="950" b="1" dirty="0">
                 <a:solidFill>
                   <a:srgbClr val="2C5F2D"/>
                 </a:solidFill>
@@ -6723,115 +6937,20 @@
               </a:rPr>
               <a:t>Operario</a:t>
             </a:r>
-            <a:endParaRPr lang="en-US" sz="1000" dirty="0"/>
-          </a:p>
-        </p:txBody>
-      </p:sp>
-      <p:sp>
-        <p:nvSpPr>
-          <p:cNvPr id="16" name="Text 13"/>
-          <p:cNvSpPr/>
-          <p:nvPr/>
-        </p:nvSpPr>
-        <p:spPr>
-          <a:xfrm>
-            <a:off x="4005072" y="2834640"/>
-            <a:ext cx="310896" cy="384048"/>
-          </a:xfrm>
-          <a:prstGeom prst="rect">
-            <a:avLst/>
-          </a:prstGeom>
-          <a:noFill/>
-          <a:ln/>
-        </p:spPr>
-        <p:txBody>
-          <a:bodyPr wrap="square" lIns="0" tIns="0" rIns="0" bIns="0" rtlCol="0" anchor="ctr"/>
-          <a:lstStyle/>
-          <a:p>
-            <a:pPr algn="ctr" indent="0" marL="0">
-              <a:buNone/>
-            </a:pPr>
-            <a:r>
-              <a:rPr lang="en-US" sz="1800" b="1" dirty="0">
-                <a:solidFill>
-                  <a:srgbClr val="97BC62"/>
-                </a:solidFill>
-                <a:latin typeface="Calibri" pitchFamily="34" charset="0"/>
-                <a:ea typeface="Calibri" pitchFamily="34" charset="-122"/>
-                <a:cs typeface="Calibri" pitchFamily="34" charset="-120"/>
-              </a:rPr>
-              <a:t>➜</a:t>
-            </a:r>
-            <a:endParaRPr lang="en-US" sz="1800" dirty="0"/>
-          </a:p>
-        </p:txBody>
-      </p:sp>
-      <p:sp>
-        <p:nvSpPr>
-          <p:cNvPr id="17" name="Text 14"/>
-          <p:cNvSpPr/>
-          <p:nvPr/>
-        </p:nvSpPr>
-        <p:spPr>
-          <a:xfrm>
-            <a:off x="3776472" y="3291840"/>
-            <a:ext cx="768096" cy="548640"/>
-          </a:xfrm>
-          <a:prstGeom prst="rect">
-            <a:avLst/>
-          </a:prstGeom>
-          <a:noFill/>
-          <a:ln/>
-        </p:spPr>
-        <p:txBody>
-          <a:bodyPr wrap="square" lIns="0" tIns="0" rIns="0" bIns="0" rtlCol="0" anchor="ctr"/>
-          <a:lstStyle/>
-          <a:p>
-            <a:pPr algn="ctr" indent="0" marL="0">
-              <a:buNone/>
-            </a:pPr>
-            <a:r>
-              <a:rPr lang="en-US" sz="950" i="1" dirty="0">
-                <a:solidFill>
-                  <a:srgbClr val="6B6B6B"/>
-                </a:solidFill>
-                <a:latin typeface="Calibri" pitchFamily="34" charset="0"/>
-                <a:ea typeface="Calibri" pitchFamily="34" charset="-122"/>
-                <a:cs typeface="Calibri" pitchFamily="34" charset="-120"/>
-              </a:rPr>
-              <a:t>Enagas</a:t>
-            </a:r>
             <a:endParaRPr lang="en-US" sz="950" dirty="0"/>
           </a:p>
-          <a:p>
-            <a:pPr algn="ctr" indent="0" marL="0">
-              <a:buNone/>
-            </a:pPr>
-            <a:r>
-              <a:rPr lang="en-US" sz="950" i="1" dirty="0">
-                <a:solidFill>
-                  <a:srgbClr val="6B6B6B"/>
-                </a:solidFill>
-                <a:latin typeface="Calibri" pitchFamily="34" charset="0"/>
-                <a:ea typeface="Calibri" pitchFamily="34" charset="-122"/>
-                <a:cs typeface="Calibri" pitchFamily="34" charset="-120"/>
-              </a:rPr>
-              <a:t>valida</a:t>
-            </a:r>
-            <a:endParaRPr lang="en-US" sz="950" dirty="0"/>
-          </a:p>
-        </p:txBody>
-      </p:sp>
-      <p:sp>
-        <p:nvSpPr>
-          <p:cNvPr id="18" name="Shape 15"/>
-          <p:cNvSpPr/>
-          <p:nvPr/>
-        </p:nvSpPr>
-        <p:spPr>
-          <a:xfrm>
-            <a:off x="4315968" y="2834640"/>
-            <a:ext cx="1572768" cy="384048"/>
+        </p:txBody>
+      </p:sp>
+      <p:sp>
+        <p:nvSpPr>
+          <p:cNvPr id="22" name="Shape 19"/>
+          <p:cNvSpPr/>
+          <p:nvPr/>
+        </p:nvSpPr>
+        <p:spPr>
+          <a:xfrm>
+            <a:off x="8010144" y="2240280"/>
+            <a:ext cx="1463040" cy="384048"/>
           </a:xfrm>
           <a:prstGeom prst="roundRect">
             <a:avLst>
@@ -6839,7 +6958,7 @@
             </a:avLst>
           </a:prstGeom>
           <a:solidFill>
-            <a:srgbClr val="1976D2"/>
+            <a:srgbClr val="388E3C"/>
           </a:solidFill>
           <a:ln/>
           <a:effectLst>
@@ -6853,14 +6972,14 @@
       </p:sp>
       <p:sp>
         <p:nvSpPr>
-          <p:cNvPr id="19" name="Text 16"/>
-          <p:cNvSpPr/>
-          <p:nvPr/>
-        </p:nvSpPr>
-        <p:spPr>
-          <a:xfrm>
-            <a:off x="4315968" y="2834640"/>
-            <a:ext cx="1572768" cy="384048"/>
+          <p:cNvPr id="23" name="Text 20"/>
+          <p:cNvSpPr/>
+          <p:nvPr/>
+        </p:nvSpPr>
+        <p:spPr>
+          <a:xfrm>
+            <a:off x="8010144" y="2240280"/>
+            <a:ext cx="1463040" cy="384048"/>
           </a:xfrm>
           <a:prstGeom prst="rect">
             <a:avLst/>
@@ -6884,7 +7003,7 @@
                 <a:ea typeface="Calibri" pitchFamily="34" charset="-122"/>
                 <a:cs typeface="Calibri" pitchFamily="34" charset="-120"/>
               </a:rPr>
-              <a:t>Validada</a:t>
+              <a:t>Finalizada</a:t>
             </a:r>
             <a:endParaRPr lang="en-US" sz="1100" dirty="0"/>
           </a:p>
@@ -6892,14 +7011,14 @@
       </p:sp>
       <p:sp>
         <p:nvSpPr>
-          <p:cNvPr id="20" name="Text 17"/>
-          <p:cNvSpPr/>
-          <p:nvPr/>
-        </p:nvSpPr>
-        <p:spPr>
-          <a:xfrm>
-            <a:off x="4315968" y="2523744"/>
-            <a:ext cx="1572768" cy="274320"/>
+          <p:cNvPr id="24" name="Text 21"/>
+          <p:cNvSpPr/>
+          <p:nvPr/>
+        </p:nvSpPr>
+        <p:spPr>
+          <a:xfrm>
+            <a:off x="9473184" y="2240280"/>
+            <a:ext cx="402336" cy="420624"/>
           </a:xfrm>
           <a:prstGeom prst="rect">
             <a:avLst/>
@@ -6915,7 +7034,46 @@
               <a:buNone/>
             </a:pPr>
             <a:r>
-              <a:rPr lang="en-US" sz="1000" b="1" dirty="0">
+              <a:rPr lang="en-US" sz="1600" b="1" dirty="0">
+                <a:solidFill>
+                  <a:srgbClr val="97BC62"/>
+                </a:solidFill>
+                <a:latin typeface="Calibri" pitchFamily="34" charset="0"/>
+                <a:ea typeface="Calibri" pitchFamily="34" charset="-122"/>
+                <a:cs typeface="Calibri" pitchFamily="34" charset="-120"/>
+              </a:rPr>
+              <a:t>➜</a:t>
+            </a:r>
+            <a:endParaRPr lang="en-US" sz="1600" dirty="0"/>
+          </a:p>
+        </p:txBody>
+      </p:sp>
+      <p:sp>
+        <p:nvSpPr>
+          <p:cNvPr id="25" name="Text 22"/>
+          <p:cNvSpPr/>
+          <p:nvPr/>
+        </p:nvSpPr>
+        <p:spPr>
+          <a:xfrm>
+            <a:off x="9875520" y="1965960"/>
+            <a:ext cx="1463040" cy="237744"/>
+          </a:xfrm>
+          <a:prstGeom prst="rect">
+            <a:avLst/>
+          </a:prstGeom>
+          <a:noFill/>
+          <a:ln/>
+        </p:spPr>
+        <p:txBody>
+          <a:bodyPr wrap="square" lIns="0" tIns="0" rIns="0" bIns="0" rtlCol="0" anchor="ctr"/>
+          <a:lstStyle/>
+          <a:p>
+            <a:pPr algn="ctr" indent="0" marL="0">
+              <a:buNone/>
+            </a:pPr>
+            <a:r>
+              <a:rPr lang="en-US" sz="950" b="1" dirty="0">
                 <a:solidFill>
                   <a:srgbClr val="1565C0"/>
                 </a:solidFill>
@@ -6925,115 +7083,20 @@
               </a:rPr>
               <a:t>Enagas</a:t>
             </a:r>
-            <a:endParaRPr lang="en-US" sz="1000" dirty="0"/>
-          </a:p>
-        </p:txBody>
-      </p:sp>
-      <p:sp>
-        <p:nvSpPr>
-          <p:cNvPr id="21" name="Text 18"/>
-          <p:cNvSpPr/>
-          <p:nvPr/>
-        </p:nvSpPr>
-        <p:spPr>
-          <a:xfrm>
-            <a:off x="5888736" y="2834640"/>
-            <a:ext cx="310896" cy="384048"/>
-          </a:xfrm>
-          <a:prstGeom prst="rect">
-            <a:avLst/>
-          </a:prstGeom>
-          <a:noFill/>
-          <a:ln/>
-        </p:spPr>
-        <p:txBody>
-          <a:bodyPr wrap="square" lIns="0" tIns="0" rIns="0" bIns="0" rtlCol="0" anchor="ctr"/>
-          <a:lstStyle/>
-          <a:p>
-            <a:pPr algn="ctr" indent="0" marL="0">
-              <a:buNone/>
-            </a:pPr>
-            <a:r>
-              <a:rPr lang="en-US" sz="1800" b="1" dirty="0">
-                <a:solidFill>
-                  <a:srgbClr val="97BC62"/>
-                </a:solidFill>
-                <a:latin typeface="Calibri" pitchFamily="34" charset="0"/>
-                <a:ea typeface="Calibri" pitchFamily="34" charset="-122"/>
-                <a:cs typeface="Calibri" pitchFamily="34" charset="-120"/>
-              </a:rPr>
-              <a:t>➜</a:t>
-            </a:r>
-            <a:endParaRPr lang="en-US" sz="1800" dirty="0"/>
-          </a:p>
-        </p:txBody>
-      </p:sp>
-      <p:sp>
-        <p:nvSpPr>
-          <p:cNvPr id="22" name="Text 19"/>
-          <p:cNvSpPr/>
-          <p:nvPr/>
-        </p:nvSpPr>
-        <p:spPr>
-          <a:xfrm>
-            <a:off x="5660136" y="3291840"/>
-            <a:ext cx="768096" cy="548640"/>
-          </a:xfrm>
-          <a:prstGeom prst="rect">
-            <a:avLst/>
-          </a:prstGeom>
-          <a:noFill/>
-          <a:ln/>
-        </p:spPr>
-        <p:txBody>
-          <a:bodyPr wrap="square" lIns="0" tIns="0" rIns="0" bIns="0" rtlCol="0" anchor="ctr"/>
-          <a:lstStyle/>
-          <a:p>
-            <a:pPr algn="ctr" indent="0" marL="0">
-              <a:buNone/>
-            </a:pPr>
-            <a:r>
-              <a:rPr lang="en-US" sz="950" i="1" dirty="0">
-                <a:solidFill>
-                  <a:srgbClr val="6B6B6B"/>
-                </a:solidFill>
-                <a:latin typeface="Calibri" pitchFamily="34" charset="0"/>
-                <a:ea typeface="Calibri" pitchFamily="34" charset="-122"/>
-                <a:cs typeface="Calibri" pitchFamily="34" charset="-120"/>
-              </a:rPr>
-              <a:t>el operario</a:t>
-            </a:r>
             <a:endParaRPr lang="en-US" sz="950" dirty="0"/>
           </a:p>
-          <a:p>
-            <a:pPr algn="ctr" indent="0" marL="0">
-              <a:buNone/>
-            </a:pPr>
-            <a:r>
-              <a:rPr lang="en-US" sz="950" i="1" dirty="0">
-                <a:solidFill>
-                  <a:srgbClr val="6B6B6B"/>
-                </a:solidFill>
-                <a:latin typeface="Calibri" pitchFamily="34" charset="0"/>
-                <a:ea typeface="Calibri" pitchFamily="34" charset="-122"/>
-                <a:cs typeface="Calibri" pitchFamily="34" charset="-120"/>
-              </a:rPr>
-              <a:t>ejecuta</a:t>
-            </a:r>
-            <a:endParaRPr lang="en-US" sz="950" dirty="0"/>
-          </a:p>
-        </p:txBody>
-      </p:sp>
-      <p:sp>
-        <p:nvSpPr>
-          <p:cNvPr id="23" name="Shape 20"/>
-          <p:cNvSpPr/>
-          <p:nvPr/>
-        </p:nvSpPr>
-        <p:spPr>
-          <a:xfrm>
-            <a:off x="6199632" y="2834640"/>
-            <a:ext cx="1572768" cy="384048"/>
+        </p:txBody>
+      </p:sp>
+      <p:sp>
+        <p:nvSpPr>
+          <p:cNvPr id="26" name="Shape 23"/>
+          <p:cNvSpPr/>
+          <p:nvPr/>
+        </p:nvSpPr>
+        <p:spPr>
+          <a:xfrm>
+            <a:off x="9875520" y="2240280"/>
+            <a:ext cx="1463040" cy="384048"/>
           </a:xfrm>
           <a:prstGeom prst="roundRect">
             <a:avLst>
@@ -7041,7 +7104,7 @@
             </a:avLst>
           </a:prstGeom>
           <a:solidFill>
-            <a:srgbClr val="F57C00"/>
+            <a:srgbClr val="546E7A"/>
           </a:solidFill>
           <a:ln/>
           <a:effectLst>
@@ -7055,14 +7118,14 @@
       </p:sp>
       <p:sp>
         <p:nvSpPr>
-          <p:cNvPr id="24" name="Text 21"/>
-          <p:cNvSpPr/>
-          <p:nvPr/>
-        </p:nvSpPr>
-        <p:spPr>
-          <a:xfrm>
-            <a:off x="6199632" y="2834640"/>
-            <a:ext cx="1572768" cy="384048"/>
+          <p:cNvPr id="27" name="Text 24"/>
+          <p:cNvSpPr/>
+          <p:nvPr/>
+        </p:nvSpPr>
+        <p:spPr>
+          <a:xfrm>
+            <a:off x="9875520" y="2240280"/>
+            <a:ext cx="1463040" cy="384048"/>
           </a:xfrm>
           <a:prstGeom prst="rect">
             <a:avLst/>
@@ -7086,7 +7149,7 @@
                 <a:ea typeface="Calibri" pitchFamily="34" charset="-122"/>
                 <a:cs typeface="Calibri" pitchFamily="34" charset="-120"/>
               </a:rPr>
-              <a:t>En Ejecución</a:t>
+              <a:t>Cerrada</a:t>
             </a:r>
             <a:endParaRPr lang="en-US" sz="1100" dirty="0"/>
           </a:p>
@@ -7094,14 +7157,84 @@
       </p:sp>
       <p:sp>
         <p:nvSpPr>
-          <p:cNvPr id="25" name="Text 22"/>
-          <p:cNvSpPr/>
-          <p:nvPr/>
-        </p:nvSpPr>
-        <p:spPr>
-          <a:xfrm>
-            <a:off x="6199632" y="2523744"/>
-            <a:ext cx="1572768" cy="274320"/>
+          <p:cNvPr id="28" name="Shape 25"/>
+          <p:cNvSpPr/>
+          <p:nvPr/>
+        </p:nvSpPr>
+        <p:spPr>
+          <a:xfrm>
+            <a:off x="6876288" y="2660904"/>
+            <a:ext cx="0" cy="146304"/>
+          </a:xfrm>
+          <a:prstGeom prst="line">
+            <a:avLst/>
+          </a:prstGeom>
+          <a:noFill/>
+          <a:ln w="22225">
+            <a:solidFill>
+              <a:srgbClr val="F57C00"/>
+            </a:solidFill>
+            <a:prstDash val="solid"/>
+          </a:ln>
+        </p:spPr>
+      </p:sp>
+      <p:sp>
+        <p:nvSpPr>
+          <p:cNvPr id="29" name="Shape 26"/>
+          <p:cNvSpPr/>
+          <p:nvPr/>
+        </p:nvSpPr>
+        <p:spPr>
+          <a:xfrm>
+            <a:off x="8741664" y="2660904"/>
+            <a:ext cx="0" cy="146304"/>
+          </a:xfrm>
+          <a:prstGeom prst="line">
+            <a:avLst/>
+          </a:prstGeom>
+          <a:noFill/>
+          <a:ln w="22225">
+            <a:solidFill>
+              <a:srgbClr val="F57C00"/>
+            </a:solidFill>
+            <a:prstDash val="solid"/>
+          </a:ln>
+        </p:spPr>
+      </p:sp>
+      <p:sp>
+        <p:nvSpPr>
+          <p:cNvPr id="30" name="Shape 27"/>
+          <p:cNvSpPr/>
+          <p:nvPr/>
+        </p:nvSpPr>
+        <p:spPr>
+          <a:xfrm>
+            <a:off x="6876288" y="2807208"/>
+            <a:ext cx="1865376" cy="0"/>
+          </a:xfrm>
+          <a:prstGeom prst="line">
+            <a:avLst/>
+          </a:prstGeom>
+          <a:noFill/>
+          <a:ln w="22225">
+            <a:solidFill>
+              <a:srgbClr val="F57C00"/>
+            </a:solidFill>
+            <a:prstDash val="dash"/>
+            <a:headEnd type="triangle"/>
+          </a:ln>
+        </p:spPr>
+      </p:sp>
+      <p:sp>
+        <p:nvSpPr>
+          <p:cNvPr id="31" name="Text 28"/>
+          <p:cNvSpPr/>
+          <p:nvPr/>
+        </p:nvSpPr>
+        <p:spPr>
+          <a:xfrm>
+            <a:off x="5779008" y="2834640"/>
+            <a:ext cx="4059936" cy="237744"/>
           </a:xfrm>
           <a:prstGeom prst="rect">
             <a:avLst/>
@@ -7117,15 +7250,15 @@
               <a:buNone/>
             </a:pPr>
             <a:r>
-              <a:rPr lang="en-US" sz="1000" b="1" dirty="0">
-                <a:solidFill>
-                  <a:srgbClr val="2C5F2D"/>
-                </a:solidFill>
-                <a:latin typeface="Calibri" pitchFamily="34" charset="0"/>
-                <a:ea typeface="Calibri" pitchFamily="34" charset="-122"/>
-                <a:cs typeface="Calibri" pitchFamily="34" charset="-120"/>
-              </a:rPr>
-              <a:t>Operario</a:t>
+              <a:rPr lang="en-US" sz="1000" i="1" dirty="0">
+                <a:solidFill>
+                  <a:srgbClr val="B45309"/>
+                </a:solidFill>
+                <a:latin typeface="Calibri" pitchFamily="34" charset="0"/>
+                <a:ea typeface="Calibri" pitchFamily="34" charset="-122"/>
+                <a:cs typeface="Calibri" pitchFamily="34" charset="-120"/>
+              </a:rPr>
+              <a:t>↺ se repite n veces</a:t>
             </a:r>
             <a:endParaRPr lang="en-US" sz="1000" dirty="0"/>
           </a:p>
@@ -7133,14 +7266,14 @@
       </p:sp>
       <p:sp>
         <p:nvSpPr>
-          <p:cNvPr id="26" name="Text 23"/>
-          <p:cNvSpPr/>
-          <p:nvPr/>
-        </p:nvSpPr>
-        <p:spPr>
-          <a:xfrm>
-            <a:off x="7772400" y="2834640"/>
-            <a:ext cx="310896" cy="384048"/>
+          <p:cNvPr id="32" name="Text 29"/>
+          <p:cNvSpPr/>
+          <p:nvPr/>
+        </p:nvSpPr>
+        <p:spPr>
+          <a:xfrm>
+            <a:off x="548640" y="3794760"/>
+            <a:ext cx="1463040" cy="237744"/>
           </a:xfrm>
           <a:prstGeom prst="rect">
             <a:avLst/>
@@ -7156,30 +7289,30 @@
               <a:buNone/>
             </a:pPr>
             <a:r>
-              <a:rPr lang="en-US" sz="1800" b="1" dirty="0">
-                <a:solidFill>
-                  <a:srgbClr val="97BC62"/>
-                </a:solidFill>
-                <a:latin typeface="Calibri" pitchFamily="34" charset="0"/>
-                <a:ea typeface="Calibri" pitchFamily="34" charset="-122"/>
-                <a:cs typeface="Calibri" pitchFamily="34" charset="-120"/>
-              </a:rPr>
-              <a:t>➜</a:t>
-            </a:r>
-            <a:endParaRPr lang="en-US" sz="1800" dirty="0"/>
-          </a:p>
-        </p:txBody>
-      </p:sp>
-      <p:sp>
-        <p:nvSpPr>
-          <p:cNvPr id="27" name="Shape 24"/>
-          <p:cNvSpPr/>
-          <p:nvPr/>
-        </p:nvSpPr>
-        <p:spPr>
-          <a:xfrm>
-            <a:off x="8083296" y="2834640"/>
-            <a:ext cx="1572768" cy="384048"/>
+              <a:rPr lang="en-US" sz="950" b="1" dirty="0">
+                <a:solidFill>
+                  <a:srgbClr val="1565C0"/>
+                </a:solidFill>
+                <a:latin typeface="Calibri" pitchFamily="34" charset="0"/>
+                <a:ea typeface="Calibri" pitchFamily="34" charset="-122"/>
+                <a:cs typeface="Calibri" pitchFamily="34" charset="-120"/>
+              </a:rPr>
+              <a:t>Enagas</a:t>
+            </a:r>
+            <a:endParaRPr lang="en-US" sz="950" dirty="0"/>
+          </a:p>
+        </p:txBody>
+      </p:sp>
+      <p:sp>
+        <p:nvSpPr>
+          <p:cNvPr id="33" name="Shape 30"/>
+          <p:cNvSpPr/>
+          <p:nvPr/>
+        </p:nvSpPr>
+        <p:spPr>
+          <a:xfrm>
+            <a:off x="548640" y="4069080"/>
+            <a:ext cx="1463040" cy="384048"/>
           </a:xfrm>
           <a:prstGeom prst="roundRect">
             <a:avLst>
@@ -7187,7 +7320,7 @@
             </a:avLst>
           </a:prstGeom>
           <a:solidFill>
-            <a:srgbClr val="388E3C"/>
+            <a:srgbClr val="78909C"/>
           </a:solidFill>
           <a:ln/>
           <a:effectLst>
@@ -7201,14 +7334,14 @@
       </p:sp>
       <p:sp>
         <p:nvSpPr>
-          <p:cNvPr id="28" name="Text 25"/>
-          <p:cNvSpPr/>
-          <p:nvPr/>
-        </p:nvSpPr>
-        <p:spPr>
-          <a:xfrm>
-            <a:off x="8083296" y="2834640"/>
-            <a:ext cx="1572768" cy="384048"/>
+          <p:cNvPr id="34" name="Text 31"/>
+          <p:cNvSpPr/>
+          <p:nvPr/>
+        </p:nvSpPr>
+        <p:spPr>
+          <a:xfrm>
+            <a:off x="548640" y="4069080"/>
+            <a:ext cx="1463040" cy="384048"/>
           </a:xfrm>
           <a:prstGeom prst="rect">
             <a:avLst/>
@@ -7232,7 +7365,7 @@
                 <a:ea typeface="Calibri" pitchFamily="34" charset="-122"/>
                 <a:cs typeface="Calibri" pitchFamily="34" charset="-120"/>
               </a:rPr>
-              <a:t>Finalizada</a:t>
+              <a:t>Propuesta</a:t>
             </a:r>
             <a:endParaRPr lang="en-US" sz="1100" dirty="0"/>
           </a:p>
@@ -7240,14 +7373,14 @@
       </p:sp>
       <p:sp>
         <p:nvSpPr>
-          <p:cNvPr id="29" name="Text 26"/>
-          <p:cNvSpPr/>
-          <p:nvPr/>
-        </p:nvSpPr>
-        <p:spPr>
-          <a:xfrm>
-            <a:off x="8083296" y="2523744"/>
-            <a:ext cx="1572768" cy="274320"/>
+          <p:cNvPr id="35" name="Text 32"/>
+          <p:cNvSpPr/>
+          <p:nvPr/>
+        </p:nvSpPr>
+        <p:spPr>
+          <a:xfrm>
+            <a:off x="2011680" y="4069080"/>
+            <a:ext cx="402336" cy="420624"/>
           </a:xfrm>
           <a:prstGeom prst="rect">
             <a:avLst/>
@@ -7263,7 +7396,46 @@
               <a:buNone/>
             </a:pPr>
             <a:r>
-              <a:rPr lang="en-US" sz="1000" b="1" dirty="0">
+              <a:rPr lang="en-US" sz="1600" b="1" dirty="0">
+                <a:solidFill>
+                  <a:srgbClr val="97BC62"/>
+                </a:solidFill>
+                <a:latin typeface="Calibri" pitchFamily="34" charset="0"/>
+                <a:ea typeface="Calibri" pitchFamily="34" charset="-122"/>
+                <a:cs typeface="Calibri" pitchFamily="34" charset="-120"/>
+              </a:rPr>
+              <a:t>➜</a:t>
+            </a:r>
+            <a:endParaRPr lang="en-US" sz="1600" dirty="0"/>
+          </a:p>
+        </p:txBody>
+      </p:sp>
+      <p:sp>
+        <p:nvSpPr>
+          <p:cNvPr id="36" name="Text 33"/>
+          <p:cNvSpPr/>
+          <p:nvPr/>
+        </p:nvSpPr>
+        <p:spPr>
+          <a:xfrm>
+            <a:off x="2414016" y="3794760"/>
+            <a:ext cx="1463040" cy="237744"/>
+          </a:xfrm>
+          <a:prstGeom prst="rect">
+            <a:avLst/>
+          </a:prstGeom>
+          <a:noFill/>
+          <a:ln/>
+        </p:spPr>
+        <p:txBody>
+          <a:bodyPr wrap="square" lIns="0" tIns="0" rIns="0" bIns="0" rtlCol="0" anchor="ctr"/>
+          <a:lstStyle/>
+          <a:p>
+            <a:pPr algn="ctr" indent="0" marL="0">
+              <a:buNone/>
+            </a:pPr>
+            <a:r>
+              <a:rPr lang="en-US" sz="950" b="1" dirty="0">
                 <a:solidFill>
                   <a:srgbClr val="2C5F2D"/>
                 </a:solidFill>
@@ -7273,115 +7445,20 @@
               </a:rPr>
               <a:t>Operario</a:t>
             </a:r>
-            <a:endParaRPr lang="en-US" sz="1000" dirty="0"/>
-          </a:p>
-        </p:txBody>
-      </p:sp>
-      <p:sp>
-        <p:nvSpPr>
-          <p:cNvPr id="30" name="Text 27"/>
-          <p:cNvSpPr/>
-          <p:nvPr/>
-        </p:nvSpPr>
-        <p:spPr>
-          <a:xfrm>
-            <a:off x="9656064" y="2834640"/>
-            <a:ext cx="310896" cy="384048"/>
-          </a:xfrm>
-          <a:prstGeom prst="rect">
-            <a:avLst/>
-          </a:prstGeom>
-          <a:noFill/>
-          <a:ln/>
-        </p:spPr>
-        <p:txBody>
-          <a:bodyPr wrap="square" lIns="0" tIns="0" rIns="0" bIns="0" rtlCol="0" anchor="ctr"/>
-          <a:lstStyle/>
-          <a:p>
-            <a:pPr algn="ctr" indent="0" marL="0">
-              <a:buNone/>
-            </a:pPr>
-            <a:r>
-              <a:rPr lang="en-US" sz="1800" b="1" dirty="0">
-                <a:solidFill>
-                  <a:srgbClr val="97BC62"/>
-                </a:solidFill>
-                <a:latin typeface="Calibri" pitchFamily="34" charset="0"/>
-                <a:ea typeface="Calibri" pitchFamily="34" charset="-122"/>
-                <a:cs typeface="Calibri" pitchFamily="34" charset="-120"/>
-              </a:rPr>
-              <a:t>➜</a:t>
-            </a:r>
-            <a:endParaRPr lang="en-US" sz="1800" dirty="0"/>
-          </a:p>
-        </p:txBody>
-      </p:sp>
-      <p:sp>
-        <p:nvSpPr>
-          <p:cNvPr id="31" name="Text 28"/>
-          <p:cNvSpPr/>
-          <p:nvPr/>
-        </p:nvSpPr>
-        <p:spPr>
-          <a:xfrm>
-            <a:off x="9427464" y="3291840"/>
-            <a:ext cx="768096" cy="548640"/>
-          </a:xfrm>
-          <a:prstGeom prst="rect">
-            <a:avLst/>
-          </a:prstGeom>
-          <a:noFill/>
-          <a:ln/>
-        </p:spPr>
-        <p:txBody>
-          <a:bodyPr wrap="square" lIns="0" tIns="0" rIns="0" bIns="0" rtlCol="0" anchor="ctr"/>
-          <a:lstStyle/>
-          <a:p>
-            <a:pPr algn="ctr" indent="0" marL="0">
-              <a:buNone/>
-            </a:pPr>
-            <a:r>
-              <a:rPr lang="en-US" sz="950" i="1" dirty="0">
-                <a:solidFill>
-                  <a:srgbClr val="6B6B6B"/>
-                </a:solidFill>
-                <a:latin typeface="Calibri" pitchFamily="34" charset="0"/>
-                <a:ea typeface="Calibri" pitchFamily="34" charset="-122"/>
-                <a:cs typeface="Calibri" pitchFamily="34" charset="-120"/>
-              </a:rPr>
-              <a:t>Enagas</a:t>
-            </a:r>
             <a:endParaRPr lang="en-US" sz="950" dirty="0"/>
           </a:p>
-          <a:p>
-            <a:pPr algn="ctr" indent="0" marL="0">
-              <a:buNone/>
-            </a:pPr>
-            <a:r>
-              <a:rPr lang="en-US" sz="950" i="1" dirty="0">
-                <a:solidFill>
-                  <a:srgbClr val="6B6B6B"/>
-                </a:solidFill>
-                <a:latin typeface="Calibri" pitchFamily="34" charset="0"/>
-                <a:ea typeface="Calibri" pitchFamily="34" charset="-122"/>
-                <a:cs typeface="Calibri" pitchFamily="34" charset="-120"/>
-              </a:rPr>
-              <a:t>cierra</a:t>
-            </a:r>
-            <a:endParaRPr lang="en-US" sz="950" dirty="0"/>
-          </a:p>
-        </p:txBody>
-      </p:sp>
-      <p:sp>
-        <p:nvSpPr>
-          <p:cNvPr id="32" name="Shape 29"/>
-          <p:cNvSpPr/>
-          <p:nvPr/>
-        </p:nvSpPr>
-        <p:spPr>
-          <a:xfrm>
-            <a:off x="9966960" y="2834640"/>
-            <a:ext cx="1572768" cy="384048"/>
+        </p:txBody>
+      </p:sp>
+      <p:sp>
+        <p:nvSpPr>
+          <p:cNvPr id="37" name="Shape 34"/>
+          <p:cNvSpPr/>
+          <p:nvPr/>
+        </p:nvSpPr>
+        <p:spPr>
+          <a:xfrm>
+            <a:off x="2414016" y="4069080"/>
+            <a:ext cx="1463040" cy="384048"/>
           </a:xfrm>
           <a:prstGeom prst="roundRect">
             <a:avLst>
@@ -7389,7 +7466,7 @@
             </a:avLst>
           </a:prstGeom>
           <a:solidFill>
-            <a:srgbClr val="546E7A"/>
+            <a:srgbClr val="F45DEA"/>
           </a:solidFill>
           <a:ln/>
           <a:effectLst>
@@ -7403,14 +7480,14 @@
       </p:sp>
       <p:sp>
         <p:nvSpPr>
-          <p:cNvPr id="33" name="Text 30"/>
-          <p:cNvSpPr/>
-          <p:nvPr/>
-        </p:nvSpPr>
-        <p:spPr>
-          <a:xfrm>
-            <a:off x="9966960" y="2834640"/>
-            <a:ext cx="1572768" cy="384048"/>
+          <p:cNvPr id="38" name="Text 35"/>
+          <p:cNvSpPr/>
+          <p:nvPr/>
+        </p:nvSpPr>
+        <p:spPr>
+          <a:xfrm>
+            <a:off x="2414016" y="4069080"/>
+            <a:ext cx="1463040" cy="384048"/>
           </a:xfrm>
           <a:prstGeom prst="rect">
             <a:avLst/>
@@ -7434,6 +7511,590 @@
                 <a:ea typeface="Calibri" pitchFamily="34" charset="-122"/>
                 <a:cs typeface="Calibri" pitchFamily="34" charset="-120"/>
               </a:rPr>
+              <a:t>Contratista</a:t>
+            </a:r>
+            <a:endParaRPr lang="en-US" sz="1100" dirty="0"/>
+          </a:p>
+        </p:txBody>
+      </p:sp>
+      <p:sp>
+        <p:nvSpPr>
+          <p:cNvPr id="39" name="Text 36"/>
+          <p:cNvSpPr/>
+          <p:nvPr/>
+        </p:nvSpPr>
+        <p:spPr>
+          <a:xfrm>
+            <a:off x="3877056" y="4069080"/>
+            <a:ext cx="402336" cy="420624"/>
+          </a:xfrm>
+          <a:prstGeom prst="rect">
+            <a:avLst/>
+          </a:prstGeom>
+          <a:noFill/>
+          <a:ln/>
+        </p:spPr>
+        <p:txBody>
+          <a:bodyPr wrap="square" lIns="0" tIns="0" rIns="0" bIns="0" rtlCol="0" anchor="ctr"/>
+          <a:lstStyle/>
+          <a:p>
+            <a:pPr algn="ctr" indent="0" marL="0">
+              <a:buNone/>
+            </a:pPr>
+            <a:r>
+              <a:rPr lang="en-US" sz="1600" b="1" dirty="0">
+                <a:solidFill>
+                  <a:srgbClr val="97BC62"/>
+                </a:solidFill>
+                <a:latin typeface="Calibri" pitchFamily="34" charset="0"/>
+                <a:ea typeface="Calibri" pitchFamily="34" charset="-122"/>
+                <a:cs typeface="Calibri" pitchFamily="34" charset="-120"/>
+              </a:rPr>
+              <a:t>➜</a:t>
+            </a:r>
+            <a:endParaRPr lang="en-US" sz="1600" dirty="0"/>
+          </a:p>
+        </p:txBody>
+      </p:sp>
+      <p:sp>
+        <p:nvSpPr>
+          <p:cNvPr id="40" name="Text 37"/>
+          <p:cNvSpPr/>
+          <p:nvPr/>
+        </p:nvSpPr>
+        <p:spPr>
+          <a:xfrm>
+            <a:off x="4279392" y="3794760"/>
+            <a:ext cx="1463040" cy="237744"/>
+          </a:xfrm>
+          <a:prstGeom prst="rect">
+            <a:avLst/>
+          </a:prstGeom>
+          <a:noFill/>
+          <a:ln/>
+        </p:spPr>
+        <p:txBody>
+          <a:bodyPr wrap="square" lIns="0" tIns="0" rIns="0" bIns="0" rtlCol="0" anchor="ctr"/>
+          <a:lstStyle/>
+          <a:p>
+            <a:pPr algn="ctr" indent="0" marL="0">
+              <a:buNone/>
+            </a:pPr>
+            <a:r>
+              <a:rPr lang="en-US" sz="950" b="1" dirty="0">
+                <a:solidFill>
+                  <a:srgbClr val="1565C0"/>
+                </a:solidFill>
+                <a:latin typeface="Calibri" pitchFamily="34" charset="0"/>
+                <a:ea typeface="Calibri" pitchFamily="34" charset="-122"/>
+                <a:cs typeface="Calibri" pitchFamily="34" charset="-120"/>
+              </a:rPr>
+              <a:t>Enagas</a:t>
+            </a:r>
+            <a:endParaRPr lang="en-US" sz="950" dirty="0"/>
+          </a:p>
+        </p:txBody>
+      </p:sp>
+      <p:sp>
+        <p:nvSpPr>
+          <p:cNvPr id="41" name="Shape 38"/>
+          <p:cNvSpPr/>
+          <p:nvPr/>
+        </p:nvSpPr>
+        <p:spPr>
+          <a:xfrm>
+            <a:off x="4279392" y="4069080"/>
+            <a:ext cx="1463040" cy="384048"/>
+          </a:xfrm>
+          <a:prstGeom prst="roundRect">
+            <a:avLst>
+              <a:gd name="adj" fmla="val 50000"/>
+            </a:avLst>
+          </a:prstGeom>
+          <a:solidFill>
+            <a:srgbClr val="1976D2"/>
+          </a:solidFill>
+          <a:ln/>
+          <a:effectLst>
+            <a:outerShdw sx="100000" sy="100000" kx="0" ky="0" algn="bl" rotWithShape="0" blurRad="88900" dist="38100" dir="8100000">
+              <a:srgbClr val="000000">
+                <a:alpha val="16000"/>
+              </a:srgbClr>
+            </a:outerShdw>
+          </a:effectLst>
+        </p:spPr>
+      </p:sp>
+      <p:sp>
+        <p:nvSpPr>
+          <p:cNvPr id="42" name="Text 39"/>
+          <p:cNvSpPr/>
+          <p:nvPr/>
+        </p:nvSpPr>
+        <p:spPr>
+          <a:xfrm>
+            <a:off x="4279392" y="4069080"/>
+            <a:ext cx="1463040" cy="384048"/>
+          </a:xfrm>
+          <a:prstGeom prst="rect">
+            <a:avLst/>
+          </a:prstGeom>
+          <a:noFill/>
+          <a:ln/>
+        </p:spPr>
+        <p:txBody>
+          <a:bodyPr wrap="square" lIns="0" tIns="0" rIns="0" bIns="0" rtlCol="0" anchor="ctr"/>
+          <a:lstStyle/>
+          <a:p>
+            <a:pPr algn="ctr" indent="0" marL="0">
+              <a:buNone/>
+            </a:pPr>
+            <a:r>
+              <a:rPr lang="en-US" sz="1100" b="1" dirty="0">
+                <a:solidFill>
+                  <a:srgbClr val="FFFFFF"/>
+                </a:solidFill>
+                <a:latin typeface="Calibri" pitchFamily="34" charset="0"/>
+                <a:ea typeface="Calibri" pitchFamily="34" charset="-122"/>
+                <a:cs typeface="Calibri" pitchFamily="34" charset="-120"/>
+              </a:rPr>
+              <a:t>Validada</a:t>
+            </a:r>
+            <a:endParaRPr lang="en-US" sz="1100" dirty="0"/>
+          </a:p>
+        </p:txBody>
+      </p:sp>
+      <p:sp>
+        <p:nvSpPr>
+          <p:cNvPr id="43" name="Text 40"/>
+          <p:cNvSpPr/>
+          <p:nvPr/>
+        </p:nvSpPr>
+        <p:spPr>
+          <a:xfrm>
+            <a:off x="5742432" y="4069080"/>
+            <a:ext cx="402336" cy="420624"/>
+          </a:xfrm>
+          <a:prstGeom prst="rect">
+            <a:avLst/>
+          </a:prstGeom>
+          <a:noFill/>
+          <a:ln/>
+        </p:spPr>
+        <p:txBody>
+          <a:bodyPr wrap="square" lIns="0" tIns="0" rIns="0" bIns="0" rtlCol="0" anchor="ctr"/>
+          <a:lstStyle/>
+          <a:p>
+            <a:pPr algn="ctr" indent="0" marL="0">
+              <a:buNone/>
+            </a:pPr>
+            <a:r>
+              <a:rPr lang="en-US" sz="1600" b="1" dirty="0">
+                <a:solidFill>
+                  <a:srgbClr val="97BC62"/>
+                </a:solidFill>
+                <a:latin typeface="Calibri" pitchFamily="34" charset="0"/>
+                <a:ea typeface="Calibri" pitchFamily="34" charset="-122"/>
+                <a:cs typeface="Calibri" pitchFamily="34" charset="-120"/>
+              </a:rPr>
+              <a:t>➜</a:t>
+            </a:r>
+            <a:endParaRPr lang="en-US" sz="1600" dirty="0"/>
+          </a:p>
+        </p:txBody>
+      </p:sp>
+      <p:sp>
+        <p:nvSpPr>
+          <p:cNvPr id="44" name="Text 41"/>
+          <p:cNvSpPr/>
+          <p:nvPr/>
+        </p:nvSpPr>
+        <p:spPr>
+          <a:xfrm>
+            <a:off x="6144768" y="3794760"/>
+            <a:ext cx="1463040" cy="237744"/>
+          </a:xfrm>
+          <a:prstGeom prst="rect">
+            <a:avLst/>
+          </a:prstGeom>
+          <a:noFill/>
+          <a:ln/>
+        </p:spPr>
+        <p:txBody>
+          <a:bodyPr wrap="square" lIns="0" tIns="0" rIns="0" bIns="0" rtlCol="0" anchor="ctr"/>
+          <a:lstStyle/>
+          <a:p>
+            <a:pPr algn="ctr" indent="0" marL="0">
+              <a:buNone/>
+            </a:pPr>
+            <a:r>
+              <a:rPr lang="en-US" sz="950" b="1" dirty="0">
+                <a:solidFill>
+                  <a:srgbClr val="2C5F2D"/>
+                </a:solidFill>
+                <a:latin typeface="Calibri" pitchFamily="34" charset="0"/>
+                <a:ea typeface="Calibri" pitchFamily="34" charset="-122"/>
+                <a:cs typeface="Calibri" pitchFamily="34" charset="-120"/>
+              </a:rPr>
+              <a:t>Operario</a:t>
+            </a:r>
+            <a:endParaRPr lang="en-US" sz="950" dirty="0"/>
+          </a:p>
+        </p:txBody>
+      </p:sp>
+      <p:sp>
+        <p:nvSpPr>
+          <p:cNvPr id="45" name="Shape 42"/>
+          <p:cNvSpPr/>
+          <p:nvPr/>
+        </p:nvSpPr>
+        <p:spPr>
+          <a:xfrm>
+            <a:off x="6144768" y="4069080"/>
+            <a:ext cx="1463040" cy="384048"/>
+          </a:xfrm>
+          <a:prstGeom prst="roundRect">
+            <a:avLst>
+              <a:gd name="adj" fmla="val 50000"/>
+            </a:avLst>
+          </a:prstGeom>
+          <a:solidFill>
+            <a:srgbClr val="F57C00"/>
+          </a:solidFill>
+          <a:ln/>
+          <a:effectLst>
+            <a:outerShdw sx="100000" sy="100000" kx="0" ky="0" algn="bl" rotWithShape="0" blurRad="88900" dist="38100" dir="8100000">
+              <a:srgbClr val="000000">
+                <a:alpha val="16000"/>
+              </a:srgbClr>
+            </a:outerShdw>
+          </a:effectLst>
+        </p:spPr>
+      </p:sp>
+      <p:sp>
+        <p:nvSpPr>
+          <p:cNvPr id="46" name="Text 43"/>
+          <p:cNvSpPr/>
+          <p:nvPr/>
+        </p:nvSpPr>
+        <p:spPr>
+          <a:xfrm>
+            <a:off x="6144768" y="4069080"/>
+            <a:ext cx="1463040" cy="384048"/>
+          </a:xfrm>
+          <a:prstGeom prst="rect">
+            <a:avLst/>
+          </a:prstGeom>
+          <a:noFill/>
+          <a:ln/>
+        </p:spPr>
+        <p:txBody>
+          <a:bodyPr wrap="square" lIns="0" tIns="0" rIns="0" bIns="0" rtlCol="0" anchor="ctr"/>
+          <a:lstStyle/>
+          <a:p>
+            <a:pPr algn="ctr" indent="0" marL="0">
+              <a:buNone/>
+            </a:pPr>
+            <a:r>
+              <a:rPr lang="en-US" sz="1100" b="1" dirty="0">
+                <a:solidFill>
+                  <a:srgbClr val="FFFFFF"/>
+                </a:solidFill>
+                <a:latin typeface="Calibri" pitchFamily="34" charset="0"/>
+                <a:ea typeface="Calibri" pitchFamily="34" charset="-122"/>
+                <a:cs typeface="Calibri" pitchFamily="34" charset="-120"/>
+              </a:rPr>
+              <a:t>En Ejecución</a:t>
+            </a:r>
+            <a:endParaRPr lang="en-US" sz="1100" dirty="0"/>
+          </a:p>
+        </p:txBody>
+      </p:sp>
+      <p:sp>
+        <p:nvSpPr>
+          <p:cNvPr id="47" name="Text 44"/>
+          <p:cNvSpPr/>
+          <p:nvPr/>
+        </p:nvSpPr>
+        <p:spPr>
+          <a:xfrm>
+            <a:off x="7607808" y="4069080"/>
+            <a:ext cx="402336" cy="420624"/>
+          </a:xfrm>
+          <a:prstGeom prst="rect">
+            <a:avLst/>
+          </a:prstGeom>
+          <a:noFill/>
+          <a:ln/>
+        </p:spPr>
+        <p:txBody>
+          <a:bodyPr wrap="square" lIns="0" tIns="0" rIns="0" bIns="0" rtlCol="0" anchor="ctr"/>
+          <a:lstStyle/>
+          <a:p>
+            <a:pPr algn="ctr" indent="0" marL="0">
+              <a:buNone/>
+            </a:pPr>
+            <a:r>
+              <a:rPr lang="en-US" sz="1600" b="1" dirty="0">
+                <a:solidFill>
+                  <a:srgbClr val="97BC62"/>
+                </a:solidFill>
+                <a:latin typeface="Calibri" pitchFamily="34" charset="0"/>
+                <a:ea typeface="Calibri" pitchFamily="34" charset="-122"/>
+                <a:cs typeface="Calibri" pitchFamily="34" charset="-120"/>
+              </a:rPr>
+              <a:t>➜</a:t>
+            </a:r>
+            <a:endParaRPr lang="en-US" sz="1600" dirty="0"/>
+          </a:p>
+        </p:txBody>
+      </p:sp>
+      <p:sp>
+        <p:nvSpPr>
+          <p:cNvPr id="48" name="Text 45"/>
+          <p:cNvSpPr/>
+          <p:nvPr/>
+        </p:nvSpPr>
+        <p:spPr>
+          <a:xfrm>
+            <a:off x="8010144" y="3794760"/>
+            <a:ext cx="1463040" cy="237744"/>
+          </a:xfrm>
+          <a:prstGeom prst="rect">
+            <a:avLst/>
+          </a:prstGeom>
+          <a:noFill/>
+          <a:ln/>
+        </p:spPr>
+        <p:txBody>
+          <a:bodyPr wrap="square" lIns="0" tIns="0" rIns="0" bIns="0" rtlCol="0" anchor="ctr"/>
+          <a:lstStyle/>
+          <a:p>
+            <a:pPr algn="ctr" indent="0" marL="0">
+              <a:buNone/>
+            </a:pPr>
+            <a:r>
+              <a:rPr lang="en-US" sz="950" b="1" dirty="0">
+                <a:solidFill>
+                  <a:srgbClr val="2C5F2D"/>
+                </a:solidFill>
+                <a:latin typeface="Calibri" pitchFamily="34" charset="0"/>
+                <a:ea typeface="Calibri" pitchFamily="34" charset="-122"/>
+                <a:cs typeface="Calibri" pitchFamily="34" charset="-120"/>
+              </a:rPr>
+              <a:t>Operario</a:t>
+            </a:r>
+            <a:endParaRPr lang="en-US" sz="950" dirty="0"/>
+          </a:p>
+        </p:txBody>
+      </p:sp>
+      <p:sp>
+        <p:nvSpPr>
+          <p:cNvPr id="49" name="Shape 46"/>
+          <p:cNvSpPr/>
+          <p:nvPr/>
+        </p:nvSpPr>
+        <p:spPr>
+          <a:xfrm>
+            <a:off x="8010144" y="4069080"/>
+            <a:ext cx="1463040" cy="384048"/>
+          </a:xfrm>
+          <a:prstGeom prst="roundRect">
+            <a:avLst>
+              <a:gd name="adj" fmla="val 50000"/>
+            </a:avLst>
+          </a:prstGeom>
+          <a:solidFill>
+            <a:srgbClr val="388E3C"/>
+          </a:solidFill>
+          <a:ln/>
+          <a:effectLst>
+            <a:outerShdw sx="100000" sy="100000" kx="0" ky="0" algn="bl" rotWithShape="0" blurRad="88900" dist="38100" dir="8100000">
+              <a:srgbClr val="000000">
+                <a:alpha val="16000"/>
+              </a:srgbClr>
+            </a:outerShdw>
+          </a:effectLst>
+        </p:spPr>
+      </p:sp>
+      <p:sp>
+        <p:nvSpPr>
+          <p:cNvPr id="50" name="Text 47"/>
+          <p:cNvSpPr/>
+          <p:nvPr/>
+        </p:nvSpPr>
+        <p:spPr>
+          <a:xfrm>
+            <a:off x="8010144" y="4069080"/>
+            <a:ext cx="1463040" cy="384048"/>
+          </a:xfrm>
+          <a:prstGeom prst="rect">
+            <a:avLst/>
+          </a:prstGeom>
+          <a:noFill/>
+          <a:ln/>
+        </p:spPr>
+        <p:txBody>
+          <a:bodyPr wrap="square" lIns="0" tIns="0" rIns="0" bIns="0" rtlCol="0" anchor="ctr"/>
+          <a:lstStyle/>
+          <a:p>
+            <a:pPr algn="ctr" indent="0" marL="0">
+              <a:buNone/>
+            </a:pPr>
+            <a:r>
+              <a:rPr lang="en-US" sz="1100" b="1" dirty="0">
+                <a:solidFill>
+                  <a:srgbClr val="FFFFFF"/>
+                </a:solidFill>
+                <a:latin typeface="Calibri" pitchFamily="34" charset="0"/>
+                <a:ea typeface="Calibri" pitchFamily="34" charset="-122"/>
+                <a:cs typeface="Calibri" pitchFamily="34" charset="-120"/>
+              </a:rPr>
+              <a:t>Finalizada</a:t>
+            </a:r>
+            <a:endParaRPr lang="en-US" sz="1100" dirty="0"/>
+          </a:p>
+        </p:txBody>
+      </p:sp>
+      <p:sp>
+        <p:nvSpPr>
+          <p:cNvPr id="51" name="Text 48"/>
+          <p:cNvSpPr/>
+          <p:nvPr/>
+        </p:nvSpPr>
+        <p:spPr>
+          <a:xfrm>
+            <a:off x="9473184" y="4069080"/>
+            <a:ext cx="402336" cy="420624"/>
+          </a:xfrm>
+          <a:prstGeom prst="rect">
+            <a:avLst/>
+          </a:prstGeom>
+          <a:noFill/>
+          <a:ln/>
+        </p:spPr>
+        <p:txBody>
+          <a:bodyPr wrap="square" lIns="0" tIns="0" rIns="0" bIns="0" rtlCol="0" anchor="ctr"/>
+          <a:lstStyle/>
+          <a:p>
+            <a:pPr algn="ctr" indent="0" marL="0">
+              <a:buNone/>
+            </a:pPr>
+            <a:r>
+              <a:rPr lang="en-US" sz="1600" b="1" dirty="0">
+                <a:solidFill>
+                  <a:srgbClr val="97BC62"/>
+                </a:solidFill>
+                <a:latin typeface="Calibri" pitchFamily="34" charset="0"/>
+                <a:ea typeface="Calibri" pitchFamily="34" charset="-122"/>
+                <a:cs typeface="Calibri" pitchFamily="34" charset="-120"/>
+              </a:rPr>
+              <a:t>➜</a:t>
+            </a:r>
+            <a:endParaRPr lang="en-US" sz="1600" dirty="0"/>
+          </a:p>
+        </p:txBody>
+      </p:sp>
+      <p:sp>
+        <p:nvSpPr>
+          <p:cNvPr id="52" name="Text 49"/>
+          <p:cNvSpPr/>
+          <p:nvPr/>
+        </p:nvSpPr>
+        <p:spPr>
+          <a:xfrm>
+            <a:off x="9875520" y="3794760"/>
+            <a:ext cx="1463040" cy="237744"/>
+          </a:xfrm>
+          <a:prstGeom prst="rect">
+            <a:avLst/>
+          </a:prstGeom>
+          <a:noFill/>
+          <a:ln/>
+        </p:spPr>
+        <p:txBody>
+          <a:bodyPr wrap="square" lIns="0" tIns="0" rIns="0" bIns="0" rtlCol="0" anchor="ctr"/>
+          <a:lstStyle/>
+          <a:p>
+            <a:pPr algn="ctr" indent="0" marL="0">
+              <a:buNone/>
+            </a:pPr>
+            <a:r>
+              <a:rPr lang="en-US" sz="950" b="1" dirty="0">
+                <a:solidFill>
+                  <a:srgbClr val="1565C0"/>
+                </a:solidFill>
+                <a:latin typeface="Calibri" pitchFamily="34" charset="0"/>
+                <a:ea typeface="Calibri" pitchFamily="34" charset="-122"/>
+                <a:cs typeface="Calibri" pitchFamily="34" charset="-120"/>
+              </a:rPr>
+              <a:t>Enagas</a:t>
+            </a:r>
+            <a:endParaRPr lang="en-US" sz="950" dirty="0"/>
+          </a:p>
+        </p:txBody>
+      </p:sp>
+      <p:sp>
+        <p:nvSpPr>
+          <p:cNvPr id="53" name="Shape 50"/>
+          <p:cNvSpPr/>
+          <p:nvPr/>
+        </p:nvSpPr>
+        <p:spPr>
+          <a:xfrm>
+            <a:off x="9875520" y="4069080"/>
+            <a:ext cx="1463040" cy="384048"/>
+          </a:xfrm>
+          <a:prstGeom prst="roundRect">
+            <a:avLst>
+              <a:gd name="adj" fmla="val 50000"/>
+            </a:avLst>
+          </a:prstGeom>
+          <a:solidFill>
+            <a:srgbClr val="546E7A"/>
+          </a:solidFill>
+          <a:ln/>
+          <a:effectLst>
+            <a:outerShdw sx="100000" sy="100000" kx="0" ky="0" algn="bl" rotWithShape="0" blurRad="88900" dist="38100" dir="8100000">
+              <a:srgbClr val="000000">
+                <a:alpha val="16000"/>
+              </a:srgbClr>
+            </a:outerShdw>
+          </a:effectLst>
+        </p:spPr>
+      </p:sp>
+      <p:sp>
+        <p:nvSpPr>
+          <p:cNvPr id="54" name="Text 51"/>
+          <p:cNvSpPr/>
+          <p:nvPr/>
+        </p:nvSpPr>
+        <p:spPr>
+          <a:xfrm>
+            <a:off x="9875520" y="4069080"/>
+            <a:ext cx="1463040" cy="384048"/>
+          </a:xfrm>
+          <a:prstGeom prst="rect">
+            <a:avLst/>
+          </a:prstGeom>
+          <a:noFill/>
+          <a:ln/>
+        </p:spPr>
+        <p:txBody>
+          <a:bodyPr wrap="square" lIns="0" tIns="0" rIns="0" bIns="0" rtlCol="0" anchor="ctr"/>
+          <a:lstStyle/>
+          <a:p>
+            <a:pPr algn="ctr" indent="0" marL="0">
+              <a:buNone/>
+            </a:pPr>
+            <a:r>
+              <a:rPr lang="en-US" sz="1100" b="1" dirty="0">
+                <a:solidFill>
+                  <a:srgbClr val="FFFFFF"/>
+                </a:solidFill>
+                <a:latin typeface="Calibri" pitchFamily="34" charset="0"/>
+                <a:ea typeface="Calibri" pitchFamily="34" charset="-122"/>
+                <a:cs typeface="Calibri" pitchFamily="34" charset="-120"/>
+              </a:rPr>
               <a:t>Cerrada</a:t>
             </a:r>
             <a:endParaRPr lang="en-US" sz="1100" dirty="0"/>
@@ -7442,14 +8103,14 @@
       </p:sp>
       <p:sp>
         <p:nvSpPr>
-          <p:cNvPr id="34" name="Text 31"/>
-          <p:cNvSpPr/>
-          <p:nvPr/>
-        </p:nvSpPr>
-        <p:spPr>
-          <a:xfrm>
-            <a:off x="9966960" y="2523744"/>
-            <a:ext cx="1572768" cy="274320"/>
+          <p:cNvPr id="55" name="Text 52"/>
+          <p:cNvSpPr/>
+          <p:nvPr/>
+        </p:nvSpPr>
+        <p:spPr>
+          <a:xfrm>
+            <a:off x="548640" y="4544568"/>
+            <a:ext cx="5193792" cy="237744"/>
           </a:xfrm>
           <a:prstGeom prst="rect">
             <a:avLst/>
@@ -7465,15 +8126,15 @@
               <a:buNone/>
             </a:pPr>
             <a:r>
-              <a:rPr lang="en-US" sz="1000" b="1" dirty="0">
-                <a:solidFill>
-                  <a:srgbClr val="1565C0"/>
-                </a:solidFill>
-                <a:latin typeface="Calibri" pitchFamily="34" charset="0"/>
-                <a:ea typeface="Calibri" pitchFamily="34" charset="-122"/>
-                <a:cs typeface="Calibri" pitchFamily="34" charset="-120"/>
-              </a:rPr>
-              <a:t>Enagas</a:t>
+              <a:rPr lang="en-US" sz="1000" i="1" dirty="0">
+                <a:solidFill>
+                  <a:srgbClr val="A21CAF"/>
+                </a:solidFill>
+                <a:latin typeface="Calibri" pitchFamily="34" charset="0"/>
+                <a:ea typeface="Calibri" pitchFamily="34" charset="-122"/>
+                <a:cs typeface="Calibri" pitchFamily="34" charset="-120"/>
+              </a:rPr>
+              <a:t>Caso 3 · el operario propone; Enagas valida antes de ejecutar</a:t>
             </a:r>
             <a:endParaRPr lang="en-US" sz="1000" dirty="0"/>
           </a:p>
@@ -7481,13 +8142,122 @@
       </p:sp>
       <p:sp>
         <p:nvSpPr>
-          <p:cNvPr id="35" name="Shape 32"/>
-          <p:cNvSpPr/>
-          <p:nvPr/>
-        </p:nvSpPr>
-        <p:spPr>
-          <a:xfrm>
-            <a:off x="548640" y="4937760"/>
+          <p:cNvPr id="56" name="Shape 53"/>
+          <p:cNvSpPr/>
+          <p:nvPr/>
+        </p:nvSpPr>
+        <p:spPr>
+          <a:xfrm>
+            <a:off x="6876288" y="4489704"/>
+            <a:ext cx="0" cy="146304"/>
+          </a:xfrm>
+          <a:prstGeom prst="line">
+            <a:avLst/>
+          </a:prstGeom>
+          <a:noFill/>
+          <a:ln w="22225">
+            <a:solidFill>
+              <a:srgbClr val="F57C00"/>
+            </a:solidFill>
+            <a:prstDash val="solid"/>
+          </a:ln>
+        </p:spPr>
+      </p:sp>
+      <p:sp>
+        <p:nvSpPr>
+          <p:cNvPr id="57" name="Shape 54"/>
+          <p:cNvSpPr/>
+          <p:nvPr/>
+        </p:nvSpPr>
+        <p:spPr>
+          <a:xfrm>
+            <a:off x="8741664" y="4489704"/>
+            <a:ext cx="0" cy="146304"/>
+          </a:xfrm>
+          <a:prstGeom prst="line">
+            <a:avLst/>
+          </a:prstGeom>
+          <a:noFill/>
+          <a:ln w="22225">
+            <a:solidFill>
+              <a:srgbClr val="F57C00"/>
+            </a:solidFill>
+            <a:prstDash val="solid"/>
+          </a:ln>
+        </p:spPr>
+      </p:sp>
+      <p:sp>
+        <p:nvSpPr>
+          <p:cNvPr id="58" name="Shape 55"/>
+          <p:cNvSpPr/>
+          <p:nvPr/>
+        </p:nvSpPr>
+        <p:spPr>
+          <a:xfrm>
+            <a:off x="6876288" y="4636008"/>
+            <a:ext cx="1865376" cy="0"/>
+          </a:xfrm>
+          <a:prstGeom prst="line">
+            <a:avLst/>
+          </a:prstGeom>
+          <a:noFill/>
+          <a:ln w="22225">
+            <a:solidFill>
+              <a:srgbClr val="F57C00"/>
+            </a:solidFill>
+            <a:prstDash val="dash"/>
+            <a:headEnd type="triangle"/>
+          </a:ln>
+        </p:spPr>
+      </p:sp>
+      <p:sp>
+        <p:nvSpPr>
+          <p:cNvPr id="59" name="Text 56"/>
+          <p:cNvSpPr/>
+          <p:nvPr/>
+        </p:nvSpPr>
+        <p:spPr>
+          <a:xfrm>
+            <a:off x="5779008" y="4663440"/>
+            <a:ext cx="4059936" cy="237744"/>
+          </a:xfrm>
+          <a:prstGeom prst="rect">
+            <a:avLst/>
+          </a:prstGeom>
+          <a:noFill/>
+          <a:ln/>
+        </p:spPr>
+        <p:txBody>
+          <a:bodyPr wrap="square" lIns="0" tIns="0" rIns="0" bIns="0" rtlCol="0" anchor="ctr"/>
+          <a:lstStyle/>
+          <a:p>
+            <a:pPr algn="ctr" indent="0" marL="0">
+              <a:buNone/>
+            </a:pPr>
+            <a:r>
+              <a:rPr lang="en-US" sz="1000" i="1" dirty="0">
+                <a:solidFill>
+                  <a:srgbClr val="B45309"/>
+                </a:solidFill>
+                <a:latin typeface="Calibri" pitchFamily="34" charset="0"/>
+                <a:ea typeface="Calibri" pitchFamily="34" charset="-122"/>
+                <a:cs typeface="Calibri" pitchFamily="34" charset="-120"/>
+              </a:rPr>
+              <a:t>↺ se repite n veces</a:t>
+            </a:r>
+            <a:endParaRPr lang="en-US" sz="1000" dirty="0"/>
+          </a:p>
+        </p:txBody>
+      </p:sp>
+      <p:sp>
+        <p:nvSpPr>
+          <p:cNvPr id="60" name="Shape 57"/>
+          <p:cNvSpPr/>
+          <p:nvPr/>
+        </p:nvSpPr>
+        <p:spPr>
+          <a:xfrm>
+            <a:off x="548640" y="5074920"/>
             <a:ext cx="11091672" cy="914400"/>
           </a:xfrm>
           <a:prstGeom prst="roundRect">
@@ -7508,13 +8278,13 @@
       </p:sp>
       <p:sp>
         <p:nvSpPr>
-          <p:cNvPr id="36" name="Text 33"/>
-          <p:cNvSpPr/>
-          <p:nvPr/>
-        </p:nvSpPr>
-        <p:spPr>
-          <a:xfrm>
-            <a:off x="868680" y="4937760"/>
+          <p:cNvPr id="61" name="Text 58"/>
+          <p:cNvSpPr/>
+          <p:nvPr/>
+        </p:nvSpPr>
+        <p:spPr>
+          <a:xfrm>
+            <a:off x="868680" y="5074920"/>
             <a:ext cx="10451592" cy="914400"/>
           </a:xfrm>
           <a:prstGeom prst="rect">
@@ -7531,7 +8301,7 @@
               <a:buNone/>
             </a:pPr>
             <a:r>
-              <a:rPr lang="en-US" sz="1600" b="1" dirty="0">
+              <a:rPr lang="en-US" sz="1450" b="1" dirty="0">
                 <a:solidFill>
                   <a:srgbClr val="2C5F2D"/>
                 </a:solidFill>
@@ -7539,13 +8309,13 @@
                 <a:ea typeface="Calibri" pitchFamily="34" charset="-122"/>
                 <a:cs typeface="Calibri" pitchFamily="34" charset="-120"/>
               </a:rPr>
-              <a:t>“Contratista” y “Validada” son el punto de traspaso: </a:t>
+              <a:t>Lo único que cambia es el arranque: </a:t>
             </a:r>
             <a:pPr indent="0" marL="0">
               <a:buNone/>
             </a:pPr>
             <a:r>
-              <a:rPr lang="en-US" sz="1600" dirty="0">
+              <a:rPr lang="en-US" sz="1450" dirty="0">
                 <a:solidFill>
                   <a:srgbClr val="2B2B2B"/>
                 </a:solidFill>
@@ -7553,9 +8323,37 @@
                 <a:ea typeface="Calibri" pitchFamily="34" charset="-122"/>
                 <a:cs typeface="Calibri" pitchFamily="34" charset="-120"/>
               </a:rPr>
-              <a:t>el operario propone, Enagas aprueba.</a:t>
-            </a:r>
-            <a:endParaRPr lang="en-US" sz="1600" dirty="0"/>
+              <a:t>si el operario propone algo, la zona pasa por Contratista → Validada; si no, Enagas la asigna ya lista. El bucle </a:t>
+            </a:r>
+            <a:pPr indent="0" marL="0">
+              <a:buNone/>
+            </a:pPr>
+            <a:r>
+              <a:rPr lang="en-US" sz="1450" b="1" dirty="0">
+                <a:solidFill>
+                  <a:srgbClr val="B45309"/>
+                </a:solidFill>
+                <a:latin typeface="Calibri" pitchFamily="34" charset="0"/>
+                <a:ea typeface="Calibri" pitchFamily="34" charset="-122"/>
+                <a:cs typeface="Calibri" pitchFamily="34" charset="-120"/>
+              </a:rPr>
+              <a:t>En Ejecución ⇄ Finalizada</a:t>
+            </a:r>
+            <a:pPr indent="0" marL="0">
+              <a:buNone/>
+            </a:pPr>
+            <a:r>
+              <a:rPr lang="en-US" sz="1450" dirty="0">
+                <a:solidFill>
+                  <a:srgbClr val="2B2B2B"/>
+                </a:solidFill>
+                <a:latin typeface="Calibri" pitchFamily="34" charset="0"/>
+                <a:ea typeface="Calibri" pitchFamily="34" charset="-122"/>
+                <a:cs typeface="Calibri" pitchFamily="34" charset="-120"/>
+              </a:rPr>
+              <a:t> se repite tantas veces como haga falta antes de que Enagas cierre la zona.</a:t>
+            </a:r>
+            <a:endParaRPr lang="en-US" sz="1450" dirty="0"/>
           </a:p>
         </p:txBody>
       </p:sp>
